--- a/slides/02.pptx
+++ b/slides/02.pptx
@@ -982,6 +982,34 @@
         <inkml:traceFormat>
           <inkml:channel name="X" type="integer" min="-2.14748E9" max="2.14748E9" units="cm"/>
           <inkml:channel name="Y" type="integer" min="-2.14748E9" max="2.14748E9" units="cm"/>
+          <inkml:channel name="F" type="integer" max="32767" units="dev"/>
+        </inkml:traceFormat>
+        <inkml:channelProperties>
+          <inkml:channelProperty channel="X" name="resolution" value="1000" units="1/cm"/>
+          <inkml:channelProperty channel="Y" name="resolution" value="1000" units="1/cm"/>
+          <inkml:channelProperty channel="F" name="resolution" value="0" units="1/dev"/>
+        </inkml:channelProperties>
+      </inkml:inkSource>
+      <inkml:timestamp xml:id="ts0" timeString="2026-05-11T07:57:46.629"/>
+    </inkml:context>
+    <inkml:brush xml:id="br0">
+      <inkml:brushProperty name="width" value="0.2" units="cm"/>
+      <inkml:brushProperty name="height" value="0.2" units="cm"/>
+      <inkml:brushProperty name="color" value="#E71224"/>
+    </inkml:brush>
+  </inkml:definitions>
+  <inkml:trace contextRef="#ctx0" brushRef="#br0">12 1968 24575,'-6'-87'0,"3"-7"0,1 41 0,2 0 0,-1-6 0,2 0 0,1 2 0,2-1 0,1-8 0,2-2 0,0 5 0,1 0 0,1-9 0,-1 0 0,-1 11 0,-1 2 0,0-1 0,0 1 0,-2 2 0,-1 1 0,0 5 0,0 0 0,-1-4 0,0 0 0,1-43 0,-1 7 0,2 19 0,-2 17 0,1 16 0,-1 8 0,1 3 0,0 2 0,-2 9 0,0 8 0,-1 6 0,0-2 0,0 0 0</inkml:trace>
+</inkml:ink>
+</file>
+
+<file path=ppt/ink/ink38.xml><?xml version="1.0" encoding="utf-8"?>
+<inkml:ink xmlns:inkml="http://www.w3.org/2003/InkML">
+  <inkml:definitions>
+    <inkml:context xml:id="ctx0">
+      <inkml:inkSource xml:id="inkSrc0">
+        <inkml:traceFormat>
+          <inkml:channel name="X" type="integer" min="-2.14748E9" max="2.14748E9" units="cm"/>
+          <inkml:channel name="Y" type="integer" min="-2.14748E9" max="2.14748E9" units="cm"/>
         </inkml:traceFormat>
         <inkml:channelProperties>
           <inkml:channelProperty channel="X" name="resolution" value="1000" units="1/cm"/>
@@ -1002,7 +1030,7 @@
 </inkml:ink>
 </file>
 
-<file path=ppt/ink/ink38.xml><?xml version="1.0" encoding="utf-8"?>
+<file path=ppt/ink/ink39.xml><?xml version="1.0" encoding="utf-8"?>
 <inkml:ink xmlns:inkml="http://www.w3.org/2003/InkML">
   <inkml:definitions>
     <inkml:context xml:id="ctx0">
@@ -1027,34 +1055,6 @@
     </inkml:brush>
   </inkml:definitions>
   <inkml:trace contextRef="#ctx0" brushRef="#br0">0 135,'69'0,"-1"0,10 0,4 0,11 0,3 0,-23 0,1 0,1 0,-2 0,0 0,0 0,-2 0,-1 0,-1 0,31 0,-3 0,-8 0,-2 0,-3 0,-2 0,-6 0,-1 0,-7 0,-2 0,-6 0,-2 0,39 0,-22 0,-21 0,-12 0,-9 0,-8 0,-6 0,1 0,3 0,6 0,6 0,4 0,10 0,15 0,22 0,-35 0,3 0,9 0,1 0,5 0,0 0,2 1,0 1,1 1,0 0,-1 0,0 0,1 0,-1 0,0-2,0 0,-3-1,0 0,-4 0,-1 0,-4 0,-1 0,-3 0,-2 0,-2 0,-2-1,47-3,-2-3,3-3,-47 5,1-1,1 1,1-1,0 0,0 0,0 0,0 0,2 0,0 0,2 0,0 1,1 0,1 1,2-1,1 1,1 0,0-1,1 2,1-1,3 0,1 0,2 1,1 0,2 1,0 0,3-1,0 0,1 2,0-1,0 0,0 1,-1-1,0 1,-3 1,0 0,-4 0,-1 0,-2 0,0 0,-3 0,-1 0,-4 0,0 0,-4 0,-2 0,41 0,-12 0,-12 0,-13 0,-6 0,-11 0,-6 0,-8 0,-7 0,4 1,-3 2,6 1,-7 0,0 0,-3-2</inkml:trace>
-</inkml:ink>
-</file>
-
-<file path=ppt/ink/ink39.xml><?xml version="1.0" encoding="utf-8"?>
-<inkml:ink xmlns:inkml="http://www.w3.org/2003/InkML">
-  <inkml:definitions>
-    <inkml:context xml:id="ctx0">
-      <inkml:inkSource xml:id="inkSrc0">
-        <inkml:traceFormat>
-          <inkml:channel name="X" type="integer" min="-2.14748E9" max="2.14748E9" units="cm"/>
-          <inkml:channel name="Y" type="integer" min="-2.14748E9" max="2.14748E9" units="cm"/>
-        </inkml:traceFormat>
-        <inkml:channelProperties>
-          <inkml:channelProperty channel="X" name="resolution" value="1000" units="1/cm"/>
-          <inkml:channelProperty channel="Y" name="resolution" value="1000" units="1/cm"/>
-        </inkml:channelProperties>
-      </inkml:inkSource>
-      <inkml:timestamp xml:id="ts0" timeString="2023-10-10T04:55:14.651"/>
-    </inkml:context>
-    <inkml:brush xml:id="br0">
-      <inkml:brushProperty name="width" value="0.4" units="cm"/>
-      <inkml:brushProperty name="height" value="0.8" units="cm"/>
-      <inkml:brushProperty name="color" value="#FFFC00"/>
-      <inkml:brushProperty name="tip" value="rectangle"/>
-      <inkml:brushProperty name="rasterOp" value="maskPen"/>
-    </inkml:brush>
-  </inkml:definitions>
-  <inkml:trace contextRef="#ctx0" brushRef="#br0">1 1,'73'2,"0"-1,16 1,5-1,-18 0,4-2,2 1,13 0,2 0,3 0,-22 0,2 0,1 0,-1 0,2 0,0 0,0 0,0 0,1 0,0 0,0 0,-1 0,1 0,-1 0,0 0,-1 0,0 0,0 0,-1 0,-2 0,20 1,-3-1,-3 2,-10-1,-2 1,-2 0,-9 1,-2 0,-2 1,19 1,-3 2,-7-1,-4 0,-6-1,-4-1,-9-1,-2 0,39 1,-16-1,-9 2,-1 0,1 0,3 2,0-1,-5 0,-2-1,4 0,9 2,16 0,-39-2,2 0,5 0,0 0,3 0,1-1,1 0,1 1,1-2,0 0,-2 0,-1 1,0-1,-1-1,-2 1,0 0,-1 0,0-1,2 0,1-1,2 1,1-1,1-1,-1 0,-1 0,-2 0,-5 0,-2 0,39 0,-5 0,-2-1,7-4,7-4,1-3,-49 5,0 0,45-5,-5-1,-3 1,-5 1,-1 2,-4 2,-5-1,-5 1,-5 2,-7 1,-2 1,-5 1,2 0,6 2,2 0,2 0,-5 0,-13 0,-11 0,-11 0,-6 0</inkml:trace>
 </inkml:ink>
 </file>
 
@@ -1100,6 +1100,34 @@
           <inkml:channelProperty channel="Y" name="resolution" value="1000" units="1/cm"/>
         </inkml:channelProperties>
       </inkml:inkSource>
+      <inkml:timestamp xml:id="ts0" timeString="2023-10-10T04:55:14.651"/>
+    </inkml:context>
+    <inkml:brush xml:id="br0">
+      <inkml:brushProperty name="width" value="0.4" units="cm"/>
+      <inkml:brushProperty name="height" value="0.8" units="cm"/>
+      <inkml:brushProperty name="color" value="#FFFC00"/>
+      <inkml:brushProperty name="tip" value="rectangle"/>
+      <inkml:brushProperty name="rasterOp" value="maskPen"/>
+    </inkml:brush>
+  </inkml:definitions>
+  <inkml:trace contextRef="#ctx0" brushRef="#br0">1 1,'73'2,"0"-1,16 1,5-1,-18 0,4-2,2 1,13 0,2 0,3 0,-22 0,2 0,1 0,-1 0,2 0,0 0,0 0,0 0,1 0,0 0,0 0,-1 0,1 0,-1 0,0 0,-1 0,0 0,0 0,-1 0,-2 0,20 1,-3-1,-3 2,-10-1,-2 1,-2 0,-9 1,-2 0,-2 1,19 1,-3 2,-7-1,-4 0,-6-1,-4-1,-9-1,-2 0,39 1,-16-1,-9 2,-1 0,1 0,3 2,0-1,-5 0,-2-1,4 0,9 2,16 0,-39-2,2 0,5 0,0 0,3 0,1-1,1 0,1 1,1-2,0 0,-2 0,-1 1,0-1,-1-1,-2 1,0 0,-1 0,0-1,2 0,1-1,2 1,1-1,1-1,-1 0,-1 0,-2 0,-5 0,-2 0,39 0,-5 0,-2-1,7-4,7-4,1-3,-49 5,0 0,45-5,-5-1,-3 1,-5 1,-1 2,-4 2,-5-1,-5 1,-5 2,-7 1,-2 1,-5 1,2 0,6 2,2 0,2 0,-5 0,-13 0,-11 0,-11 0,-6 0</inkml:trace>
+</inkml:ink>
+</file>
+
+<file path=ppt/ink/ink41.xml><?xml version="1.0" encoding="utf-8"?>
+<inkml:ink xmlns:inkml="http://www.w3.org/2003/InkML">
+  <inkml:definitions>
+    <inkml:context xml:id="ctx0">
+      <inkml:inkSource xml:id="inkSrc0">
+        <inkml:traceFormat>
+          <inkml:channel name="X" type="integer" min="-2.14748E9" max="2.14748E9" units="cm"/>
+          <inkml:channel name="Y" type="integer" min="-2.14748E9" max="2.14748E9" units="cm"/>
+        </inkml:traceFormat>
+        <inkml:channelProperties>
+          <inkml:channelProperty channel="X" name="resolution" value="1000" units="1/cm"/>
+          <inkml:channelProperty channel="Y" name="resolution" value="1000" units="1/cm"/>
+        </inkml:channelProperties>
+      </inkml:inkSource>
       <inkml:timestamp xml:id="ts0" timeString="2023-10-10T04:56:27.182"/>
     </inkml:context>
     <inkml:brush xml:id="br0">
@@ -1114,7 +1142,7 @@
 </inkml:ink>
 </file>
 
-<file path=ppt/ink/ink41.xml><?xml version="1.0" encoding="utf-8"?>
+<file path=ppt/ink/ink42.xml><?xml version="1.0" encoding="utf-8"?>
 <inkml:ink xmlns:inkml="http://www.w3.org/2003/InkML">
   <inkml:definitions>
     <inkml:context xml:id="ctx0">
@@ -1142,7 +1170,7 @@
 </inkml:ink>
 </file>
 
-<file path=ppt/ink/ink42.xml><?xml version="1.0" encoding="utf-8"?>
+<file path=ppt/ink/ink43.xml><?xml version="1.0" encoding="utf-8"?>
 <inkml:ink xmlns:inkml="http://www.w3.org/2003/InkML">
   <inkml:definitions>
     <inkml:context xml:id="ctx0">
@@ -1170,7 +1198,7 @@
 </inkml:ink>
 </file>
 
-<file path=ppt/ink/ink43.xml><?xml version="1.0" encoding="utf-8"?>
+<file path=ppt/ink/ink44.xml><?xml version="1.0" encoding="utf-8"?>
 <inkml:ink xmlns:inkml="http://www.w3.org/2003/InkML">
   <inkml:definitions>
     <inkml:context xml:id="ctx0">
@@ -1198,7 +1226,7 @@
 </inkml:ink>
 </file>
 
-<file path=ppt/ink/ink44.xml><?xml version="1.0" encoding="utf-8"?>
+<file path=ppt/ink/ink45.xml><?xml version="1.0" encoding="utf-8"?>
 <inkml:ink xmlns:inkml="http://www.w3.org/2003/InkML">
   <inkml:definitions>
     <inkml:context xml:id="ctx0">
@@ -1226,7 +1254,7 @@
 </inkml:ink>
 </file>
 
-<file path=ppt/ink/ink45.xml><?xml version="1.0" encoding="utf-8"?>
+<file path=ppt/ink/ink46.xml><?xml version="1.0" encoding="utf-8"?>
 <inkml:ink xmlns:inkml="http://www.w3.org/2003/InkML">
   <inkml:definitions>
     <inkml:context xml:id="ctx0">
@@ -1254,7 +1282,7 @@
 </inkml:ink>
 </file>
 
-<file path=ppt/ink/ink46.xml><?xml version="1.0" encoding="utf-8"?>
+<file path=ppt/ink/ink47.xml><?xml version="1.0" encoding="utf-8"?>
 <inkml:ink xmlns:inkml="http://www.w3.org/2003/InkML">
   <inkml:definitions>
     <inkml:context xml:id="ctx0">
@@ -1282,7 +1310,7 @@
 </inkml:ink>
 </file>
 
-<file path=ppt/ink/ink47.xml><?xml version="1.0" encoding="utf-8"?>
+<file path=ppt/ink/ink48.xml><?xml version="1.0" encoding="utf-8"?>
 <inkml:ink xmlns:inkml="http://www.w3.org/2003/InkML">
   <inkml:definitions>
     <inkml:context xml:id="ctx0">
@@ -1310,7 +1338,7 @@
 </inkml:ink>
 </file>
 
-<file path=ppt/ink/ink48.xml><?xml version="1.0" encoding="utf-8"?>
+<file path=ppt/ink/ink49.xml><?xml version="1.0" encoding="utf-8"?>
 <inkml:ink xmlns:inkml="http://www.w3.org/2003/InkML">
   <inkml:definitions>
     <inkml:context xml:id="ctx0">
@@ -1560,7 +1588,7 @@
           <a:p>
             <a:fld id="{DF57DBD2-1147-D643-B826-0934AC4F62F5}" type="datetimeFigureOut">
               <a:rPr lang="en-JP" smtClean="0"/>
-              <a:t>2025/10/21</a:t>
+              <a:t>5/11/26</a:t>
             </a:fld>
             <a:endParaRPr lang="en-JP"/>
           </a:p>
@@ -1975,7 +2003,7 @@
           <a:p>
             <a:fld id="{BA9AA998-EBA0-1C48-8711-98FCA6F1658F}" type="datetime1">
               <a:rPr kumimoji="1" lang="en-US" altLang="ja-JP" smtClean="0"/>
-              <a:t>10/21/25</a:t>
+              <a:t>5/11/26</a:t>
             </a:fld>
             <a:endParaRPr kumimoji="1" lang="ja-JP" altLang="en-US"/>
           </a:p>
@@ -2205,7 +2233,7 @@
           <a:p>
             <a:fld id="{FB3C5475-C806-E34B-8048-182FF37EEF82}" type="datetime1">
               <a:rPr kumimoji="1" lang="en-US" altLang="ja-JP" smtClean="0"/>
-              <a:t>10/21/25</a:t>
+              <a:t>5/11/26</a:t>
             </a:fld>
             <a:endParaRPr kumimoji="1" lang="ja-JP" altLang="en-US"/>
           </a:p>
@@ -2445,7 +2473,7 @@
           <a:p>
             <a:fld id="{85453B0A-DC2A-734E-B1F0-3EDA3DDB853E}" type="datetime1">
               <a:rPr kumimoji="1" lang="en-US" altLang="ja-JP" smtClean="0"/>
-              <a:t>10/21/25</a:t>
+              <a:t>5/11/26</a:t>
             </a:fld>
             <a:endParaRPr kumimoji="1" lang="ja-JP" altLang="en-US"/>
           </a:p>
@@ -2675,7 +2703,7 @@
           <a:p>
             <a:fld id="{0B62D75B-BD59-8F4C-8DEE-F4296A70A448}" type="datetime1">
               <a:rPr kumimoji="1" lang="en-US" altLang="ja-JP" smtClean="0"/>
-              <a:t>10/21/25</a:t>
+              <a:t>5/11/26</a:t>
             </a:fld>
             <a:endParaRPr kumimoji="1" lang="ja-JP" altLang="en-US"/>
           </a:p>
@@ -2950,7 +2978,7 @@
           <a:p>
             <a:fld id="{6E7AE56C-E670-6649-8DF4-CD45CDD43B04}" type="datetime1">
               <a:rPr kumimoji="1" lang="en-US" altLang="ja-JP" smtClean="0"/>
-              <a:t>10/21/25</a:t>
+              <a:t>5/11/26</a:t>
             </a:fld>
             <a:endParaRPr kumimoji="1" lang="ja-JP" altLang="en-US"/>
           </a:p>
@@ -3279,7 +3307,7 @@
           <a:p>
             <a:fld id="{6D6AD1D1-708E-6C42-986D-2FFE98A546F5}" type="datetime1">
               <a:rPr kumimoji="1" lang="en-US" altLang="ja-JP" smtClean="0"/>
-              <a:t>10/21/25</a:t>
+              <a:t>5/11/26</a:t>
             </a:fld>
             <a:endParaRPr kumimoji="1" lang="ja-JP" altLang="en-US"/>
           </a:p>
@@ -3755,7 +3783,7 @@
           <a:p>
             <a:fld id="{4254C107-EA7F-BA42-AD63-A54F41A83FF7}" type="datetime1">
               <a:rPr kumimoji="1" lang="en-US" altLang="ja-JP" smtClean="0"/>
-              <a:t>10/21/25</a:t>
+              <a:t>5/11/26</a:t>
             </a:fld>
             <a:endParaRPr kumimoji="1" lang="ja-JP" altLang="en-US"/>
           </a:p>
@@ -3896,7 +3924,7 @@
           <a:p>
             <a:fld id="{59B74F5F-2D05-2149-93C5-9679E7ACFC60}" type="datetime1">
               <a:rPr kumimoji="1" lang="en-US" altLang="ja-JP" smtClean="0"/>
-              <a:t>10/21/25</a:t>
+              <a:t>5/11/26</a:t>
             </a:fld>
             <a:endParaRPr kumimoji="1" lang="ja-JP" altLang="en-US"/>
           </a:p>
@@ -4009,7 +4037,7 @@
           <a:p>
             <a:fld id="{B21949EF-6D70-3542-9D41-C0362C678EDA}" type="datetime1">
               <a:rPr kumimoji="1" lang="en-US" altLang="ja-JP" smtClean="0"/>
-              <a:t>10/21/25</a:t>
+              <a:t>5/11/26</a:t>
             </a:fld>
             <a:endParaRPr kumimoji="1" lang="ja-JP" altLang="en-US"/>
           </a:p>
@@ -4352,7 +4380,7 @@
           <a:p>
             <a:fld id="{5B196819-B1C5-D34F-87C4-B67893F81421}" type="datetime1">
               <a:rPr kumimoji="1" lang="en-US" altLang="ja-JP" smtClean="0"/>
-              <a:t>10/21/25</a:t>
+              <a:t>5/11/26</a:t>
             </a:fld>
             <a:endParaRPr kumimoji="1" lang="ja-JP" altLang="en-US"/>
           </a:p>
@@ -4640,7 +4668,7 @@
           <a:p>
             <a:fld id="{CB519F4F-FA26-2644-92C5-C26DD39DD34F}" type="datetime1">
               <a:rPr kumimoji="1" lang="en-US" altLang="ja-JP" smtClean="0"/>
-              <a:t>10/21/25</a:t>
+              <a:t>5/11/26</a:t>
             </a:fld>
             <a:endParaRPr kumimoji="1" lang="ja-JP" altLang="en-US"/>
           </a:p>
@@ -4913,7 +4941,7 @@
           <a:p>
             <a:fld id="{2654C008-9884-8449-BC7F-3A9ADBC21C1B}" type="datetime1">
               <a:rPr kumimoji="1" lang="en-US" altLang="ja-JP" smtClean="0"/>
-              <a:t>10/21/25</a:t>
+              <a:t>5/11/26</a:t>
             </a:fld>
             <a:endParaRPr kumimoji="1" lang="ja-JP" altLang="en-US"/>
           </a:p>
@@ -5598,8 +5626,16 @@
               <a:t></a:t>
             </a:r>
             <a:r>
+              <a:rPr kumimoji="1" lang="ja-JP" altLang="en-US" dirty="0">
+                <a:highlight>
+                  <a:srgbClr val="00FF00"/>
+                </a:highlight>
+              </a:rPr>
+              <a:t>保有効果（現状維持バイアスの一種）</a:t>
+            </a:r>
+            <a:r>
               <a:rPr kumimoji="1" lang="ja-JP" altLang="en-US" dirty="0"/>
-              <a:t>保有効果（現状維持バイアスの一種）がある人ほど貿易自由化への賛意低い（現状維持を選んでしまう）</a:t>
+              <a:t>がある人ほど貿易自由化への賛意低い（現状維持を選んでしまう）</a:t>
             </a:r>
             <a:endParaRPr kumimoji="1" lang="en-US" altLang="ja-JP" dirty="0"/>
           </a:p>
@@ -5698,8 +5734,8 @@
           </a:p>
         </p:txBody>
       </p:sp>
-      <mc:AlternateContent xmlns:mc="http://schemas.openxmlformats.org/markup-compatibility/2006" xmlns:a14="http://schemas.microsoft.com/office/drawing/2010/main">
-        <mc:Choice Requires="a14">
+      <mc:AlternateContent xmlns:mc="http://schemas.openxmlformats.org/markup-compatibility/2006">
+        <mc:Choice xmlns:a14="http://schemas.microsoft.com/office/drawing/2010/main" Requires="a14">
           <p:sp>
             <p:nvSpPr>
               <p:cNvPr id="3" name="コンテンツ プレースホルダー 2">
@@ -5749,7 +5785,31 @@
                 </a:pPr>
                 <a:r>
                   <a:rPr kumimoji="1" lang="ja-JP" altLang="en-US" dirty="0"/>
-                  <a:t>政権与党が国の経済厚生だけでなく，政治献金額も考慮して，自由貿易（</a:t>
+                  <a:t>政権与党が</a:t>
+                </a:r>
+                <a:r>
+                  <a:rPr kumimoji="1" lang="ja-JP" altLang="en-US" dirty="0">
+                    <a:highlight>
+                      <a:srgbClr val="00FF00"/>
+                    </a:highlight>
+                  </a:rPr>
+                  <a:t>国の経済厚生</a:t>
+                </a:r>
+                <a:r>
+                  <a:rPr kumimoji="1" lang="ja-JP" altLang="en-US" dirty="0"/>
+                  <a:t>だけでなく，</a:t>
+                </a:r>
+                <a:r>
+                  <a:rPr kumimoji="1" lang="ja-JP" altLang="en-US" dirty="0">
+                    <a:highlight>
+                      <a:srgbClr val="FFFF00"/>
+                    </a:highlight>
+                  </a:rPr>
+                  <a:t>政治献金額</a:t>
+                </a:r>
+                <a:r>
+                  <a:rPr kumimoji="1" lang="ja-JP" altLang="en-US" dirty="0"/>
+                  <a:t>も考慮して，自由貿易（</a:t>
                 </a:r>
                 <a:r>
                   <a:rPr kumimoji="1" lang="en-US" altLang="ja-JP" dirty="0"/>
@@ -5781,22 +5841,42 @@
               </a:p>
               <a:p>
                 <a:r>
-                  <a:rPr kumimoji="1" lang="ja-JP" altLang="en-US" dirty="0"/>
+                  <a:rPr kumimoji="1" lang="ja-JP" altLang="en-US" dirty="0">
+                    <a:highlight>
+                      <a:srgbClr val="00FF00"/>
+                    </a:highlight>
+                  </a:rPr>
                   <a:t>経済厚生：</a:t>
                 </a:r>
                 <a:r>
-                  <a:rPr kumimoji="1" lang="en-US" altLang="ja-JP" dirty="0"/>
+                  <a:rPr kumimoji="1" lang="en-US" altLang="ja-JP" dirty="0">
+                    <a:highlight>
+                      <a:srgbClr val="00FF00"/>
+                    </a:highlight>
+                  </a:rPr>
                   <a:t>W</a:t>
                 </a:r>
-                <a:endParaRPr kumimoji="1" lang="ja-JP" altLang="en-US" dirty="0"/>
+                <a:endParaRPr kumimoji="1" lang="ja-JP" altLang="en-US" dirty="0">
+                  <a:highlight>
+                    <a:srgbClr val="00FF00"/>
+                  </a:highlight>
+                </a:endParaRPr>
               </a:p>
               <a:p>
                 <a:r>
-                  <a:rPr kumimoji="1" lang="ja-JP" altLang="en-US" dirty="0"/>
+                  <a:rPr kumimoji="1" lang="ja-JP" altLang="en-US" dirty="0">
+                    <a:highlight>
+                      <a:srgbClr val="FFFF00"/>
+                    </a:highlight>
+                  </a:rPr>
                   <a:t>政治献金額：</a:t>
                 </a:r>
                 <a:r>
-                  <a:rPr kumimoji="1" lang="en-US" altLang="ja-JP" dirty="0"/>
+                  <a:rPr kumimoji="1" lang="en-US" altLang="ja-JP" dirty="0">
+                    <a:highlight>
+                      <a:srgbClr val="FFFF00"/>
+                    </a:highlight>
+                  </a:rPr>
                   <a:t>C</a:t>
                 </a:r>
               </a:p>
@@ -5807,11 +5887,22 @@
                 </a:pPr>
                 <a:r>
                   <a:rPr lang="ja-JP" altLang="ja-JP" kern="100" dirty="0">
+                    <a:solidFill>
+                      <a:srgbClr val="FF0000"/>
+                    </a:solidFill>
                     <a:effectLst/>
                     <a:latin typeface="+mn-ea"/>
                     <a:cs typeface="Times New Roman" panose="02020603050405020304" pitchFamily="18" charset="0"/>
                   </a:rPr>
-                  <a:t>自由貿易政策の場合：</a:t>
+                  <a:t>自由貿易</a:t>
+                </a:r>
+                <a:r>
+                  <a:rPr lang="ja-JP" altLang="ja-JP" kern="100" dirty="0">
+                    <a:effectLst/>
+                    <a:latin typeface="+mn-ea"/>
+                    <a:cs typeface="Times New Roman" panose="02020603050405020304" pitchFamily="18" charset="0"/>
+                  </a:rPr>
+                  <a:t>政策の場合：</a:t>
                 </a:r>
                 <a14:m>
                   <m:oMath xmlns:m="http://schemas.openxmlformats.org/officeDocument/2006/math">
@@ -5855,8 +5946,11 @@
                       <m:t>=</m:t>
                     </m:r>
                     <m:r>
-                      <a:rPr lang="en-US" altLang="ja-JP" i="1" kern="100">
+                      <a:rPr lang="en-US" altLang="ja-JP" i="1" kern="100" smtClean="0">
                         <a:effectLst/>
+                        <a:highlight>
+                          <a:srgbClr val="FF00FF"/>
+                        </a:highlight>
                         <a:latin typeface="Cambria Math" panose="02040503050406030204" pitchFamily="18" charset="0"/>
                         <a:cs typeface="Times New Roman" panose="02020603050405020304" pitchFamily="18" charset="0"/>
                       </a:rPr>
@@ -5867,6 +5961,9 @@
                         <m:ctrlPr>
                           <a:rPr lang="ja-JP" altLang="ja-JP" i="1" kern="100">
                             <a:effectLst/>
+                            <a:highlight>
+                              <a:srgbClr val="00FF00"/>
+                            </a:highlight>
                             <a:latin typeface="Cambria Math" panose="02040503050406030204" pitchFamily="18" charset="0"/>
                             <a:cs typeface="Times New Roman" panose="02020603050405020304" pitchFamily="18" charset="0"/>
                           </a:rPr>
@@ -5876,6 +5973,9 @@
                         <m:r>
                           <a:rPr lang="en-US" altLang="ja-JP" i="1" kern="100">
                             <a:effectLst/>
+                            <a:highlight>
+                              <a:srgbClr val="00FF00"/>
+                            </a:highlight>
                             <a:latin typeface="Cambria Math" panose="02040503050406030204" pitchFamily="18" charset="0"/>
                             <a:cs typeface="Times New Roman" panose="02020603050405020304" pitchFamily="18" charset="0"/>
                           </a:rPr>
@@ -5886,6 +5986,9 @@
                         <m:r>
                           <a:rPr lang="en-US" altLang="ja-JP" i="1" kern="100">
                             <a:effectLst/>
+                            <a:highlight>
+                              <a:srgbClr val="00FF00"/>
+                            </a:highlight>
                             <a:latin typeface="Cambria Math" panose="02040503050406030204" pitchFamily="18" charset="0"/>
                             <a:cs typeface="Times New Roman" panose="02020603050405020304" pitchFamily="18" charset="0"/>
                           </a:rPr>
@@ -5906,6 +6009,9 @@
                         <m:ctrlPr>
                           <a:rPr lang="ja-JP" altLang="ja-JP" i="1" kern="100">
                             <a:effectLst/>
+                            <a:highlight>
+                              <a:srgbClr val="FFFF00"/>
+                            </a:highlight>
                             <a:latin typeface="Cambria Math" panose="02040503050406030204" pitchFamily="18" charset="0"/>
                             <a:cs typeface="Times New Roman" panose="02020603050405020304" pitchFamily="18" charset="0"/>
                           </a:rPr>
@@ -5915,6 +6021,9 @@
                         <m:r>
                           <a:rPr lang="en-US" altLang="ja-JP" i="1" kern="100">
                             <a:effectLst/>
+                            <a:highlight>
+                              <a:srgbClr val="FFFF00"/>
+                            </a:highlight>
                             <a:latin typeface="Cambria Math" panose="02040503050406030204" pitchFamily="18" charset="0"/>
                             <a:cs typeface="Times New Roman" panose="02020603050405020304" pitchFamily="18" charset="0"/>
                           </a:rPr>
@@ -5925,6 +6034,9 @@
                         <m:r>
                           <a:rPr lang="en-US" altLang="ja-JP" i="1" kern="100">
                             <a:effectLst/>
+                            <a:highlight>
+                              <a:srgbClr val="FFFF00"/>
+                            </a:highlight>
                             <a:latin typeface="Cambria Math" panose="02040503050406030204" pitchFamily="18" charset="0"/>
                             <a:cs typeface="Times New Roman" panose="02020603050405020304" pitchFamily="18" charset="0"/>
                           </a:rPr>
@@ -5936,6 +6048,9 @@
                 </a14:m>
                 <a:endParaRPr lang="ja-JP" altLang="ja-JP" kern="100" dirty="0">
                   <a:effectLst/>
+                  <a:highlight>
+                    <a:srgbClr val="FFFF00"/>
+                  </a:highlight>
                   <a:latin typeface="+mn-ea"/>
                   <a:cs typeface="Times New Roman" panose="02020603050405020304" pitchFamily="18" charset="0"/>
                 </a:endParaRPr>
@@ -5947,11 +6062,22 @@
                 </a:pPr>
                 <a:r>
                   <a:rPr lang="ja-JP" altLang="ja-JP" kern="100" dirty="0">
+                    <a:solidFill>
+                      <a:srgbClr val="0432FF"/>
+                    </a:solidFill>
                     <a:effectLst/>
                     <a:latin typeface="+mn-ea"/>
                     <a:cs typeface="Times New Roman" panose="02020603050405020304" pitchFamily="18" charset="0"/>
                   </a:rPr>
-                  <a:t>保護貿易政策の場合：</a:t>
+                  <a:t>保護貿易</a:t>
+                </a:r>
+                <a:r>
+                  <a:rPr lang="ja-JP" altLang="ja-JP" kern="100" dirty="0">
+                    <a:effectLst/>
+                    <a:latin typeface="+mn-ea"/>
+                    <a:cs typeface="Times New Roman" panose="02020603050405020304" pitchFamily="18" charset="0"/>
+                  </a:rPr>
+                  <a:t>政策の場合：</a:t>
                 </a:r>
                 <a14:m>
                   <m:oMath xmlns:m="http://schemas.openxmlformats.org/officeDocument/2006/math">
@@ -5997,6 +6123,9 @@
                     <m:r>
                       <a:rPr lang="en-US" altLang="ja-JP" i="1" kern="100">
                         <a:effectLst/>
+                        <a:highlight>
+                          <a:srgbClr val="FF00FF"/>
+                        </a:highlight>
                         <a:latin typeface="Cambria Math" panose="02040503050406030204" pitchFamily="18" charset="0"/>
                         <a:cs typeface="Times New Roman" panose="02020603050405020304" pitchFamily="18" charset="0"/>
                       </a:rPr>
@@ -6007,6 +6136,9 @@
                         <m:ctrlPr>
                           <a:rPr lang="ja-JP" altLang="ja-JP" i="1" kern="100">
                             <a:effectLst/>
+                            <a:highlight>
+                              <a:srgbClr val="00FF00"/>
+                            </a:highlight>
                             <a:latin typeface="Cambria Math" panose="02040503050406030204" pitchFamily="18" charset="0"/>
                             <a:cs typeface="Times New Roman" panose="02020603050405020304" pitchFamily="18" charset="0"/>
                           </a:rPr>
@@ -6016,6 +6148,9 @@
                         <m:r>
                           <a:rPr lang="en-US" altLang="ja-JP" i="1" kern="100">
                             <a:effectLst/>
+                            <a:highlight>
+                              <a:srgbClr val="00FF00"/>
+                            </a:highlight>
                             <a:latin typeface="Cambria Math" panose="02040503050406030204" pitchFamily="18" charset="0"/>
                             <a:cs typeface="Times New Roman" panose="02020603050405020304" pitchFamily="18" charset="0"/>
                           </a:rPr>
@@ -6026,6 +6161,9 @@
                         <m:r>
                           <a:rPr lang="en-US" altLang="ja-JP" i="1" kern="100">
                             <a:effectLst/>
+                            <a:highlight>
+                              <a:srgbClr val="00FF00"/>
+                            </a:highlight>
                             <a:latin typeface="Cambria Math" panose="02040503050406030204" pitchFamily="18" charset="0"/>
                             <a:cs typeface="Times New Roman" panose="02020603050405020304" pitchFamily="18" charset="0"/>
                           </a:rPr>
@@ -6046,6 +6184,9 @@
                         <m:ctrlPr>
                           <a:rPr lang="ja-JP" altLang="ja-JP" i="1" kern="100">
                             <a:effectLst/>
+                            <a:highlight>
+                              <a:srgbClr val="FFFF00"/>
+                            </a:highlight>
                             <a:latin typeface="Cambria Math" panose="02040503050406030204" pitchFamily="18" charset="0"/>
                             <a:cs typeface="Times New Roman" panose="02020603050405020304" pitchFamily="18" charset="0"/>
                           </a:rPr>
@@ -6055,6 +6196,9 @@
                         <m:r>
                           <a:rPr lang="en-US" altLang="ja-JP" i="1" kern="100">
                             <a:effectLst/>
+                            <a:highlight>
+                              <a:srgbClr val="FFFF00"/>
+                            </a:highlight>
                             <a:latin typeface="Cambria Math" panose="02040503050406030204" pitchFamily="18" charset="0"/>
                             <a:cs typeface="Times New Roman" panose="02020603050405020304" pitchFamily="18" charset="0"/>
                           </a:rPr>
@@ -6065,6 +6209,9 @@
                         <m:r>
                           <a:rPr lang="en-US" altLang="ja-JP" i="1" kern="100">
                             <a:effectLst/>
+                            <a:highlight>
+                              <a:srgbClr val="FFFF00"/>
+                            </a:highlight>
                             <a:latin typeface="Cambria Math" panose="02040503050406030204" pitchFamily="18" charset="0"/>
                             <a:cs typeface="Times New Roman" panose="02020603050405020304" pitchFamily="18" charset="0"/>
                           </a:rPr>
@@ -6076,6 +6223,9 @@
                 </a14:m>
                 <a:endParaRPr lang="en-US" altLang="ja-JP" kern="100" dirty="0">
                   <a:effectLst/>
+                  <a:highlight>
+                    <a:srgbClr val="FFFF00"/>
+                  </a:highlight>
                   <a:latin typeface="+mn-ea"/>
                   <a:cs typeface="Times New Roman" panose="02020603050405020304" pitchFamily="18" charset="0"/>
                 </a:endParaRPr>
@@ -6112,7 +6262,7 @@
             </p:txBody>
           </p:sp>
         </mc:Choice>
-        <mc:Fallback xmlns="">
+        <mc:Fallback>
           <p:sp>
             <p:nvSpPr>
               <p:cNvPr id="3" name="コンテンツ プレースホルダー 2">
@@ -6137,7 +6287,7 @@
               <a:blipFill>
                 <a:blip r:embed="rId2"/>
                 <a:stretch>
-                  <a:fillRect l="-1434" t="-3501"/>
+                  <a:fillRect l="-1392" t="-3790"/>
                 </a:stretch>
               </a:blipFill>
             </p:spPr>
@@ -6156,8 +6306,8 @@
           </p:sp>
         </mc:Fallback>
       </mc:AlternateContent>
-      <mc:AlternateContent xmlns:mc="http://schemas.openxmlformats.org/markup-compatibility/2006" xmlns:a14="http://schemas.microsoft.com/office/drawing/2010/main">
-        <mc:Choice Requires="a14">
+      <mc:AlternateContent xmlns:mc="http://schemas.openxmlformats.org/markup-compatibility/2006">
+        <mc:Choice xmlns:a14="http://schemas.microsoft.com/office/drawing/2010/main" Requires="a14">
           <p:sp>
             <p:nvSpPr>
               <p:cNvPr id="4" name="コンテンツ プレースホルダー 3">
@@ -6336,6 +6486,9 @@
                     <m:r>
                       <a:rPr lang="en-US" altLang="ja-JP" i="1">
                         <a:effectLst/>
+                        <a:highlight>
+                          <a:srgbClr val="FF00FF"/>
+                        </a:highlight>
                         <a:latin typeface="Cambria Math" panose="02040503050406030204" pitchFamily="18" charset="0"/>
                         <a:cs typeface="Times New Roman" panose="02020603050405020304" pitchFamily="18" charset="0"/>
                       </a:rPr>
@@ -6356,6 +6509,9 @@
                             <m:ctrlPr>
                               <a:rPr lang="ja-JP" altLang="ja-JP" i="1">
                                 <a:effectLst/>
+                                <a:highlight>
+                                  <a:srgbClr val="00FF00"/>
+                                </a:highlight>
                                 <a:latin typeface="Cambria Math" panose="02040503050406030204" pitchFamily="18" charset="0"/>
                               </a:rPr>
                             </m:ctrlPr>
@@ -6364,6 +6520,9 @@
                             <m:r>
                               <a:rPr lang="en-US" altLang="ja-JP" i="1">
                                 <a:effectLst/>
+                                <a:highlight>
+                                  <a:srgbClr val="00FF00"/>
+                                </a:highlight>
                                 <a:latin typeface="Cambria Math" panose="02040503050406030204" pitchFamily="18" charset="0"/>
                                 <a:cs typeface="Times New Roman" panose="02020603050405020304" pitchFamily="18" charset="0"/>
                               </a:rPr>
@@ -6374,6 +6533,9 @@
                             <m:r>
                               <a:rPr lang="en-US" altLang="ja-JP" i="1">
                                 <a:effectLst/>
+                                <a:highlight>
+                                  <a:srgbClr val="00FF00"/>
+                                </a:highlight>
                                 <a:latin typeface="Cambria Math" panose="02040503050406030204" pitchFamily="18" charset="0"/>
                                 <a:cs typeface="Times New Roman" panose="02020603050405020304" pitchFamily="18" charset="0"/>
                               </a:rPr>
@@ -6394,6 +6556,9 @@
                             <m:ctrlPr>
                               <a:rPr lang="ja-JP" altLang="ja-JP" i="1">
                                 <a:effectLst/>
+                                <a:highlight>
+                                  <a:srgbClr val="00FF00"/>
+                                </a:highlight>
                                 <a:latin typeface="Cambria Math" panose="02040503050406030204" pitchFamily="18" charset="0"/>
                               </a:rPr>
                             </m:ctrlPr>
@@ -6402,6 +6567,9 @@
                             <m:r>
                               <a:rPr lang="en-US" altLang="ja-JP" i="1">
                                 <a:effectLst/>
+                                <a:highlight>
+                                  <a:srgbClr val="00FF00"/>
+                                </a:highlight>
                                 <a:latin typeface="Cambria Math" panose="02040503050406030204" pitchFamily="18" charset="0"/>
                                 <a:cs typeface="Times New Roman" panose="02020603050405020304" pitchFamily="18" charset="0"/>
                               </a:rPr>
@@ -6412,6 +6580,9 @@
                             <m:r>
                               <a:rPr lang="en-US" altLang="ja-JP" i="1">
                                 <a:effectLst/>
+                                <a:highlight>
+                                  <a:srgbClr val="00FF00"/>
+                                </a:highlight>
                                 <a:latin typeface="Cambria Math" panose="02040503050406030204" pitchFamily="18" charset="0"/>
                                 <a:cs typeface="Times New Roman" panose="02020603050405020304" pitchFamily="18" charset="0"/>
                               </a:rPr>
@@ -6434,6 +6605,9 @@
                         <m:ctrlPr>
                           <a:rPr lang="ja-JP" altLang="ja-JP" i="1">
                             <a:effectLst/>
+                            <a:highlight>
+                              <a:srgbClr val="FFFF00"/>
+                            </a:highlight>
                             <a:latin typeface="Cambria Math" panose="02040503050406030204" pitchFamily="18" charset="0"/>
                           </a:rPr>
                         </m:ctrlPr>
@@ -6442,6 +6616,9 @@
                         <m:r>
                           <a:rPr lang="en-US" altLang="ja-JP" i="1">
                             <a:effectLst/>
+                            <a:highlight>
+                              <a:srgbClr val="FFFF00"/>
+                            </a:highlight>
                             <a:latin typeface="Cambria Math" panose="02040503050406030204" pitchFamily="18" charset="0"/>
                             <a:cs typeface="Times New Roman" panose="02020603050405020304" pitchFamily="18" charset="0"/>
                           </a:rPr>
@@ -6452,6 +6629,9 @@
                         <m:r>
                           <a:rPr lang="en-US" altLang="ja-JP" i="1">
                             <a:effectLst/>
+                            <a:highlight>
+                              <a:srgbClr val="FFFF00"/>
+                            </a:highlight>
                             <a:latin typeface="Cambria Math" panose="02040503050406030204" pitchFamily="18" charset="0"/>
                             <a:cs typeface="Times New Roman" panose="02020603050405020304" pitchFamily="18" charset="0"/>
                           </a:rPr>
@@ -6476,6 +6656,9 @@
                         <m:ctrlPr>
                           <a:rPr lang="ja-JP" altLang="ja-JP" i="1">
                             <a:effectLst/>
+                            <a:highlight>
+                              <a:srgbClr val="FFFF00"/>
+                            </a:highlight>
                             <a:latin typeface="Cambria Math" panose="02040503050406030204" pitchFamily="18" charset="0"/>
                           </a:rPr>
                         </m:ctrlPr>
@@ -6484,6 +6667,9 @@
                         <m:r>
                           <a:rPr lang="en-US" altLang="ja-JP" i="1">
                             <a:effectLst/>
+                            <a:highlight>
+                              <a:srgbClr val="FFFF00"/>
+                            </a:highlight>
                             <a:latin typeface="Cambria Math" panose="02040503050406030204" pitchFamily="18" charset="0"/>
                             <a:cs typeface="Times New Roman" panose="02020603050405020304" pitchFamily="18" charset="0"/>
                           </a:rPr>
@@ -6494,6 +6680,9 @@
                         <m:r>
                           <a:rPr lang="en-US" altLang="ja-JP" i="1">
                             <a:effectLst/>
+                            <a:highlight>
+                              <a:srgbClr val="FFFF00"/>
+                            </a:highlight>
                             <a:latin typeface="Cambria Math" panose="02040503050406030204" pitchFamily="18" charset="0"/>
                             <a:cs typeface="Times New Roman" panose="02020603050405020304" pitchFamily="18" charset="0"/>
                           </a:rPr>
@@ -6504,6 +6693,9 @@
                   </m:oMath>
                 </a14:m>
                 <a:endParaRPr kumimoji="1" lang="en-US" altLang="ja-JP" dirty="0">
+                  <a:highlight>
+                    <a:srgbClr val="FFFF00"/>
+                  </a:highlight>
                   <a:latin typeface="+mn-ea"/>
                 </a:endParaRPr>
               </a:p>
@@ -6769,6 +6961,9 @@
                     <m:r>
                       <a:rPr lang="en-US" altLang="ja-JP" sz="3000" i="1" kern="100">
                         <a:effectLst/>
+                        <a:highlight>
+                          <a:srgbClr val="FFFF00"/>
+                        </a:highlight>
                         <a:latin typeface="Cambria Math" panose="02040503050406030204" pitchFamily="18" charset="0"/>
                         <a:cs typeface="Times New Roman" panose="02020603050405020304" pitchFamily="18" charset="0"/>
                       </a:rPr>
@@ -6778,6 +6973,9 @@
                 </a14:m>
                 <a:r>
                   <a:rPr kumimoji="1" lang="en-US" altLang="ja-JP" sz="3000" dirty="0">
+                    <a:highlight>
+                      <a:srgbClr val="FFFF00"/>
+                    </a:highlight>
                     <a:latin typeface="+mn-ea"/>
                   </a:rPr>
                   <a:t>=0.0001</a:t>
@@ -7001,7 +7199,7 @@
             </p:txBody>
           </p:sp>
         </mc:Choice>
-        <mc:Fallback xmlns="">
+        <mc:Fallback>
           <p:sp>
             <p:nvSpPr>
               <p:cNvPr id="4" name="コンテンツ プレースホルダー 3">
@@ -7026,7 +7224,7 @@
               <a:blipFill>
                 <a:blip r:embed="rId3"/>
                 <a:stretch>
-                  <a:fillRect l="-2194" t="-3501" r="-8255"/>
+                  <a:fillRect l="-2174" t="-3790" r="-8261"/>
                 </a:stretch>
               </a:blipFill>
             </p:spPr>
@@ -7074,6 +7272,57 @@
           </a:p>
         </p:txBody>
       </p:sp>
+      <mc:AlternateContent xmlns:mc="http://schemas.openxmlformats.org/markup-compatibility/2006">
+        <mc:Choice xmlns:p14="http://schemas.microsoft.com/office/powerpoint/2010/main" Requires="p14">
+          <p:contentPart p14:bwMode="auto" r:id="rId4">
+            <p14:nvContentPartPr>
+              <p14:cNvPr id="6" name="インク 5">
+                <a:extLst>
+                  <a:ext uri="{FF2B5EF4-FFF2-40B4-BE49-F238E27FC236}">
+                    <a16:creationId xmlns:a16="http://schemas.microsoft.com/office/drawing/2014/main" id="{EBE1FC3C-641B-4069-5BE1-2243D8F8EF59}"/>
+                  </a:ext>
+                </a:extLst>
+              </p14:cNvPr>
+              <p14:cNvContentPartPr/>
+              <p14:nvPr/>
+            </p14:nvContentPartPr>
+            <p14:xfrm>
+              <a:off x="11182605" y="1459188"/>
+              <a:ext cx="42480" cy="708840"/>
+            </p14:xfrm>
+          </p:contentPart>
+        </mc:Choice>
+        <mc:Fallback>
+          <p:pic>
+            <p:nvPicPr>
+              <p:cNvPr id="6" name="インク 5">
+                <a:extLst>
+                  <a:ext uri="{FF2B5EF4-FFF2-40B4-BE49-F238E27FC236}">
+                    <a16:creationId xmlns:a16="http://schemas.microsoft.com/office/drawing/2014/main" id="{EBE1FC3C-641B-4069-5BE1-2243D8F8EF59}"/>
+                  </a:ext>
+                </a:extLst>
+              </p:cNvPr>
+              <p:cNvPicPr/>
+              <p:nvPr/>
+            </p:nvPicPr>
+            <p:blipFill>
+              <a:blip r:embed="rId5"/>
+              <a:stretch>
+                <a:fillRect/>
+              </a:stretch>
+            </p:blipFill>
+            <p:spPr>
+              <a:xfrm>
+                <a:off x="11146605" y="1423548"/>
+                <a:ext cx="114120" cy="780480"/>
+              </a:xfrm>
+              <a:prstGeom prst="rect">
+                <a:avLst/>
+              </a:prstGeom>
+            </p:spPr>
+          </p:pic>
+        </mc:Fallback>
+      </mc:AlternateContent>
     </p:spTree>
     <p:extLst>
       <p:ext uri="{BB962C8B-B14F-4D97-AF65-F5344CB8AC3E}">
@@ -7197,19 +7446,35 @@
               <a:t>を通じた政治献金は増加傾向、</a:t>
             </a:r>
             <a:r>
-              <a:rPr lang="en-US" altLang="ja-JP" b="0" dirty="0"/>
+              <a:rPr lang="en-US" altLang="ja-JP" b="0" dirty="0">
+                <a:highlight>
+                  <a:srgbClr val="FFFF00"/>
+                </a:highlight>
+              </a:rPr>
               <a:t>2020</a:t>
             </a:r>
             <a:r>
-              <a:rPr lang="ja-JP" altLang="en-US" b="0" dirty="0"/>
+              <a:rPr lang="ja-JP" altLang="en-US" b="0" dirty="0">
+                <a:highlight>
+                  <a:srgbClr val="FFFF00"/>
+                </a:highlight>
+              </a:rPr>
               <a:t>年で総額</a:t>
             </a:r>
             <a:r>
-              <a:rPr lang="en-US" altLang="ja-JP" b="0" dirty="0"/>
+              <a:rPr lang="en-US" altLang="ja-JP" b="0" dirty="0">
+                <a:highlight>
+                  <a:srgbClr val="FFFF00"/>
+                </a:highlight>
+              </a:rPr>
               <a:t>5.6</a:t>
             </a:r>
             <a:r>
-              <a:rPr lang="ja-JP" altLang="en-US" b="0" dirty="0"/>
+              <a:rPr lang="ja-JP" altLang="en-US" b="0" dirty="0">
+                <a:highlight>
+                  <a:srgbClr val="FFFF00"/>
+                </a:highlight>
+              </a:rPr>
               <a:t>億ドル</a:t>
             </a:r>
           </a:p>
@@ -7276,7 +7541,15 @@
             </a:pPr>
             <a:r>
               <a:rPr lang="ja-JP" altLang="en-US" b="0" dirty="0"/>
-              <a:t>自由民主党の献金の受け皿となる政治資金団体「国民政治協会」に対する，企業・団体献金、政権与党時は増加傾向</a:t>
+              <a:t>自由民主党の献金の受け皿となる政治資金団体「国民政治協会」に対する，</a:t>
+            </a:r>
+            <a:r>
+              <a:rPr lang="ja-JP" altLang="en-US" b="0" dirty="0">
+                <a:highlight>
+                  <a:srgbClr val="FFFF00"/>
+                </a:highlight>
+              </a:rPr>
+              <a:t>企業・団体献金、政権与党時は増加傾向</a:t>
             </a:r>
           </a:p>
         </p:txBody>
@@ -14099,8 +14372,8 @@
           </p:pic>
         </mc:Fallback>
       </mc:AlternateContent>
-      <mc:AlternateContent xmlns:mc="http://schemas.openxmlformats.org/markup-compatibility/2006" xmlns:p14="http://schemas.microsoft.com/office/powerpoint/2010/main">
-        <mc:Choice Requires="p14">
+      <mc:AlternateContent xmlns:mc="http://schemas.openxmlformats.org/markup-compatibility/2006">
+        <mc:Choice xmlns:p14="http://schemas.microsoft.com/office/powerpoint/2010/main" Requires="p14">
           <p:contentPart p14:bwMode="auto" r:id="rId38">
             <p14:nvContentPartPr>
               <p14:cNvPr id="23" name="Ink 22">
@@ -14114,12 +14387,12 @@
               <p14:nvPr/>
             </p14:nvContentPartPr>
             <p14:xfrm>
-              <a:off x="6414473" y="4180517"/>
+              <a:off x="6427433" y="4130174"/>
               <a:ext cx="1252440" cy="81360"/>
             </p14:xfrm>
           </p:contentPart>
         </mc:Choice>
-        <mc:Fallback xmlns="">
+        <mc:Fallback>
           <p:pic>
             <p:nvPicPr>
               <p:cNvPr id="23" name="Ink 22">
@@ -14140,8 +14413,8 @@
             </p:blipFill>
             <p:spPr>
               <a:xfrm>
-                <a:off x="6342473" y="4036877"/>
-                <a:ext cx="1396080" cy="369000"/>
+                <a:off x="6355433" y="3985534"/>
+                <a:ext cx="1396080" cy="370278"/>
               </a:xfrm>
               <a:prstGeom prst="rect">
                 <a:avLst/>
@@ -14420,19 +14693,40 @@
               <a:rPr lang="ja-JP" altLang="en-US" dirty="0">
                 <a:sym typeface="Wingdings" panose="05000000000000000000" pitchFamily="2" charset="2"/>
               </a:rPr>
-              <a:t>「貿易は良いことだ」が</a:t>
+              <a:t>「</a:t>
+            </a:r>
+            <a:r>
+              <a:rPr lang="ja-JP" altLang="en-US" dirty="0">
+                <a:highlight>
+                  <a:srgbClr val="00FFFF"/>
+                </a:highlight>
+                <a:sym typeface="Wingdings" panose="05000000000000000000" pitchFamily="2" charset="2"/>
+              </a:rPr>
+              <a:t>貿易は良いことだ」が</a:t>
             </a:r>
             <a:r>
               <a:rPr lang="en-US" altLang="ja-JP" dirty="0">
+                <a:highlight>
+                  <a:srgbClr val="00FFFF"/>
+                </a:highlight>
                 <a:sym typeface="Wingdings" panose="05000000000000000000" pitchFamily="2" charset="2"/>
               </a:rPr>
               <a:t>72</a:t>
             </a:r>
             <a:r>
               <a:rPr lang="ja-JP" altLang="en-US" dirty="0">
+                <a:highlight>
+                  <a:srgbClr val="00FFFF"/>
+                </a:highlight>
                 <a:sym typeface="Wingdings" panose="05000000000000000000" pitchFamily="2" charset="2"/>
               </a:rPr>
-              <a:t>％である一方「貿易は雇用をもたらす」は</a:t>
+              <a:t>％</a:t>
+            </a:r>
+            <a:r>
+              <a:rPr lang="ja-JP" altLang="en-US" dirty="0">
+                <a:sym typeface="Wingdings" panose="05000000000000000000" pitchFamily="2" charset="2"/>
+              </a:rPr>
+              <a:t>である一方「貿易は雇用をもたらす」は</a:t>
             </a:r>
             <a:r>
               <a:rPr lang="en-US" altLang="ja-JP" dirty="0">
@@ -14864,10 +15158,18 @@
           <a:lstStyle/>
           <a:p>
             <a:r>
-              <a:rPr kumimoji="1" lang="ja-JP" altLang="en-US" dirty="0"/>
+              <a:rPr kumimoji="1" lang="ja-JP" altLang="en-US" dirty="0">
+                <a:highlight>
+                  <a:srgbClr val="00FFFF"/>
+                </a:highlight>
+              </a:rPr>
               <a:t>行動バイアス</a:t>
             </a:r>
-            <a:endParaRPr kumimoji="1" lang="en-US" altLang="ja-JP" dirty="0"/>
+            <a:endParaRPr kumimoji="1" lang="en-US" altLang="ja-JP" dirty="0">
+              <a:highlight>
+                <a:srgbClr val="00FFFF"/>
+              </a:highlight>
+            </a:endParaRPr>
           </a:p>
           <a:p>
             <a:pPr>
@@ -14880,9 +15182,21 @@
             </a:r>
             <a:r>
               <a:rPr kumimoji="1" lang="ja-JP" altLang="en-US" dirty="0"/>
-              <a:t>非経済的な要因も。その一つが現状維持バイアス</a:t>
-            </a:r>
-            <a:endParaRPr kumimoji="1" lang="en-US" altLang="ja-JP" dirty="0"/>
+              <a:t>非経済的な要因も。その一つが</a:t>
+            </a:r>
+            <a:r>
+              <a:rPr kumimoji="1" lang="ja-JP" altLang="en-US" dirty="0">
+                <a:highlight>
+                  <a:srgbClr val="00FFFF"/>
+                </a:highlight>
+              </a:rPr>
+              <a:t>現状維持バイアス</a:t>
+            </a:r>
+            <a:endParaRPr kumimoji="1" lang="en-US" altLang="ja-JP" dirty="0">
+              <a:highlight>
+                <a:srgbClr val="00FFFF"/>
+              </a:highlight>
+            </a:endParaRPr>
           </a:p>
           <a:p>
             <a:pPr>
@@ -14921,28 +15235,64 @@
               <a:t>この宝くじの期待収入（</a:t>
             </a:r>
             <a:r>
-              <a:rPr kumimoji="1" lang="en-US" altLang="ja-JP" dirty="0"/>
+              <a:rPr kumimoji="1" lang="en-US" altLang="ja-JP" dirty="0">
+                <a:highlight>
+                  <a:srgbClr val="00FFFF"/>
+                </a:highlight>
+              </a:rPr>
               <a:t>1/100×100</a:t>
             </a:r>
             <a:r>
+              <a:rPr kumimoji="1" lang="ja-JP" altLang="en-US" dirty="0">
+                <a:highlight>
+                  <a:srgbClr val="00FFFF"/>
+                </a:highlight>
+              </a:rPr>
+              <a:t>万円</a:t>
+            </a:r>
+            <a:r>
               <a:rPr kumimoji="1" lang="ja-JP" altLang="en-US" dirty="0"/>
-              <a:t>万円）は</a:t>
-            </a:r>
-            <a:r>
-              <a:rPr kumimoji="1" lang="en-US" altLang="ja-JP" dirty="0"/>
+              <a:t>）は</a:t>
+            </a:r>
+            <a:r>
+              <a:rPr kumimoji="1" lang="en-US" altLang="ja-JP" dirty="0">
+                <a:highlight>
+                  <a:srgbClr val="00FFFF"/>
+                </a:highlight>
+              </a:rPr>
               <a:t>1</a:t>
             </a:r>
             <a:r>
+              <a:rPr kumimoji="1" lang="ja-JP" altLang="en-US" dirty="0">
+                <a:highlight>
+                  <a:srgbClr val="00FFFF"/>
+                </a:highlight>
+              </a:rPr>
+              <a:t>万円</a:t>
+            </a:r>
+            <a:r>
               <a:rPr kumimoji="1" lang="ja-JP" altLang="en-US" dirty="0"/>
-              <a:t>万円なので</a:t>
-            </a:r>
-            <a:r>
-              <a:rPr kumimoji="1" lang="en-US" altLang="ja-JP" dirty="0"/>
+              <a:t>なので</a:t>
+            </a:r>
+            <a:r>
+              <a:rPr kumimoji="1" lang="en-US" altLang="ja-JP" dirty="0">
+                <a:highlight>
+                  <a:srgbClr val="00FFFF"/>
+                </a:highlight>
+              </a:rPr>
               <a:t>2</a:t>
             </a:r>
             <a:r>
+              <a:rPr kumimoji="1" lang="ja-JP" altLang="en-US" dirty="0">
+                <a:highlight>
+                  <a:srgbClr val="00FFFF"/>
+                </a:highlight>
+              </a:rPr>
+              <a:t>千円</a:t>
+            </a:r>
+            <a:r>
               <a:rPr kumimoji="1" lang="ja-JP" altLang="en-US" dirty="0"/>
-              <a:t>千円で買うのは経済合理的</a:t>
+              <a:t>で買うのは経済合理的</a:t>
             </a:r>
             <a:endParaRPr kumimoji="1" lang="en-US" altLang="ja-JP" dirty="0"/>
           </a:p>
@@ -15004,7 +15354,37 @@
               <a:rPr kumimoji="1" lang="ja-JP" altLang="en-US" dirty="0">
                 <a:sym typeface="Wingdings" panose="05000000000000000000" pitchFamily="2" charset="2"/>
               </a:rPr>
-              <a:t>興味深いのは「買わない」はずなのに持っていたら「売らない」が過半になること</a:t>
+              <a:t>興味深いのは</a:t>
+            </a:r>
+            <a:r>
+              <a:rPr kumimoji="1" lang="ja-JP" altLang="en-US" dirty="0">
+                <a:highlight>
+                  <a:srgbClr val="FFFF00"/>
+                </a:highlight>
+                <a:sym typeface="Wingdings" panose="05000000000000000000" pitchFamily="2" charset="2"/>
+              </a:rPr>
+              <a:t>「買わない」</a:t>
+            </a:r>
+            <a:r>
+              <a:rPr kumimoji="1" lang="ja-JP" altLang="en-US" dirty="0">
+                <a:sym typeface="Wingdings" panose="05000000000000000000" pitchFamily="2" charset="2"/>
+              </a:rPr>
+              <a:t>はずなのに持っていたら</a:t>
+            </a:r>
+            <a:r>
+              <a:rPr kumimoji="1" lang="ja-JP" altLang="en-US" dirty="0">
+                <a:highlight>
+                  <a:srgbClr val="00FFFF"/>
+                </a:highlight>
+                <a:sym typeface="Wingdings" panose="05000000000000000000" pitchFamily="2" charset="2"/>
+              </a:rPr>
+              <a:t>「売らない」</a:t>
+            </a:r>
+            <a:r>
+              <a:rPr kumimoji="1" lang="ja-JP" altLang="en-US" dirty="0">
+                <a:sym typeface="Wingdings" panose="05000000000000000000" pitchFamily="2" charset="2"/>
+              </a:rPr>
+              <a:t>が過半になること</a:t>
             </a:r>
             <a:endParaRPr kumimoji="1" lang="en-US" altLang="ja-JP" dirty="0"/>
           </a:p>
@@ -15022,7 +15402,22 @@
               <a:rPr kumimoji="1" lang="ja-JP" altLang="en-US" dirty="0">
                 <a:sym typeface="Wingdings" panose="05000000000000000000" pitchFamily="2" charset="2"/>
               </a:rPr>
-              <a:t>同じ価値であっても人は自分が保有しているものは高く評価してしまう「保有効果」</a:t>
+              <a:t>同じ価値であっても人は自分が保有しているものは高く評価してしまう「</a:t>
+            </a:r>
+            <a:r>
+              <a:rPr kumimoji="1" lang="ja-JP" altLang="en-US" dirty="0">
+                <a:highlight>
+                  <a:srgbClr val="00FF00"/>
+                </a:highlight>
+                <a:sym typeface="Wingdings" panose="05000000000000000000" pitchFamily="2" charset="2"/>
+              </a:rPr>
+              <a:t>保有効果</a:t>
+            </a:r>
+            <a:r>
+              <a:rPr kumimoji="1" lang="ja-JP" altLang="en-US" dirty="0">
+                <a:sym typeface="Wingdings" panose="05000000000000000000" pitchFamily="2" charset="2"/>
+              </a:rPr>
+              <a:t>」</a:t>
             </a:r>
             <a:r>
               <a:rPr lang="ja-JP" altLang="en-US" dirty="0">
